--- a/第一讲/第1讲_课程作业汇报_感知世界与中文分词实践.pptx
+++ b/第一讲/第1讲_课程作业汇报_感知世界与中文分词实践.pptx
@@ -526,34 +526,7 @@
           <a:bodyPr/>
           <a:lstStyle/>
           <a:p>
-            <a:r>
-              <a:rPr lang="zh-CN" altLang="en-US" dirty="0"/>
-              <a:t>制作流程：手动给出模版</a:t>
-            </a:r>
-            <a:r>
-              <a:rPr lang="en-US" altLang="zh-CN" dirty="0"/>
-              <a:t>ppt</a:t>
-            </a:r>
-            <a:r>
-              <a:rPr lang="zh-CN" altLang="en-US" dirty="0"/>
-              <a:t>，框架，重点，作业完成过程等，让</a:t>
-            </a:r>
-            <a:r>
-              <a:rPr lang="en-US" altLang="zh-CN" dirty="0"/>
-              <a:t>antigravity</a:t>
-            </a:r>
-            <a:r>
-              <a:rPr lang="zh-CN" altLang="en-US" dirty="0"/>
-              <a:t>使用</a:t>
-            </a:r>
-            <a:r>
-              <a:rPr lang="en-US" altLang="zh-CN" dirty="0" err="1"/>
-              <a:t>pptmaster</a:t>
-            </a:r>
-            <a:r>
-              <a:rPr lang="zh-CN" altLang="en-US" dirty="0"/>
-              <a:t>完善措辞与视觉效果</a:t>
-            </a:r>
+            <a:endParaRPr lang="zh-CN" altLang="en-US" dirty="0"/>
           </a:p>
         </p:txBody>
       </p:sp>
@@ -2115,7 +2088,7 @@
         <p:spPr>
           <a:xfrm>
             <a:off x="1382894" y="5512757"/>
-            <a:ext cx="1880643" cy="261610"/>
+            <a:ext cx="7008650" cy="600164"/>
           </a:xfrm>
           <a:prstGeom prst="rect">
             <a:avLst/>
@@ -2164,6 +2137,78 @@
               </a:rPr>
               <a:t>辅助制作</a:t>
             </a:r>
+            <a:endParaRPr lang="en-US" altLang="zh-CN" sz="1100" dirty="0">
+              <a:solidFill>
+                <a:schemeClr val="bg1"/>
+              </a:solidFill>
+              <a:latin typeface="+mn-ea"/>
+            </a:endParaRPr>
+          </a:p>
+          <a:p>
+            <a:r>
+              <a:rPr lang="zh-CN" altLang="en-US" sz="1100" dirty="0">
+                <a:solidFill>
+                  <a:schemeClr val="bg1"/>
+                </a:solidFill>
+              </a:rPr>
+              <a:t>制作流程：手动给出模版</a:t>
+            </a:r>
+            <a:r>
+              <a:rPr lang="en-US" altLang="zh-CN" sz="1100" dirty="0">
+                <a:solidFill>
+                  <a:schemeClr val="bg1"/>
+                </a:solidFill>
+              </a:rPr>
+              <a:t>ppt</a:t>
+            </a:r>
+            <a:r>
+              <a:rPr lang="zh-CN" altLang="en-US" sz="1100" dirty="0">
+                <a:solidFill>
+                  <a:schemeClr val="bg1"/>
+                </a:solidFill>
+              </a:rPr>
+              <a:t>，框架，重点，作业完成过程等，让</a:t>
+            </a:r>
+            <a:r>
+              <a:rPr lang="en-US" altLang="zh-CN" sz="1100" dirty="0">
+                <a:solidFill>
+                  <a:schemeClr val="bg1"/>
+                </a:solidFill>
+              </a:rPr>
+              <a:t>Antigravity</a:t>
+            </a:r>
+            <a:r>
+              <a:rPr lang="zh-CN" altLang="en-US" sz="1100" dirty="0">
+                <a:solidFill>
+                  <a:schemeClr val="bg1"/>
+                </a:solidFill>
+              </a:rPr>
+              <a:t>使用</a:t>
+            </a:r>
+            <a:r>
+              <a:rPr lang="en-US" altLang="zh-CN" sz="1100" dirty="0" err="1">
+                <a:solidFill>
+                  <a:schemeClr val="bg1"/>
+                </a:solidFill>
+              </a:rPr>
+              <a:t>pptmaster</a:t>
+            </a:r>
+            <a:r>
+              <a:rPr lang="zh-CN" altLang="en-US" sz="1100" dirty="0">
+                <a:solidFill>
+                  <a:schemeClr val="bg1"/>
+                </a:solidFill>
+              </a:rPr>
+              <a:t>完善措辞与视觉效果</a:t>
+            </a:r>
+          </a:p>
+          <a:p>
+            <a:endParaRPr lang="zh-CN" altLang="en-US" sz="1100" dirty="0">
+              <a:solidFill>
+                <a:schemeClr val="bg1"/>
+              </a:solidFill>
+              <a:latin typeface="+mn-ea"/>
+            </a:endParaRPr>
           </a:p>
         </p:txBody>
       </p:sp>
